--- a/Day4_Likelihood_BayesI/FW536_Day4_Morning_maximum likelihod_nosoln_accessible.pptx
+++ b/Day4_Likelihood_BayesI/FW536_Day4_Morning_maximum likelihod_nosoln_accessible.pptx
@@ -8366,7 +8366,7 @@
               <a:rPr lang="en-AU" altLang="en-US" sz="2000" dirty="0">
                 <a:latin typeface="Arial" charset="0"/>
               </a:rPr>
-              <a:t>Like &lt;- Probs^30*(1-Probs)^20</a:t>
+              <a:t>Like &lt;- Prob^30*(1-Prob)^20</a:t>
             </a:r>
           </a:p>
           <a:p>
@@ -8618,31 +8618,31 @@
               <a:rPr lang="en-AU" altLang="en-US" sz="2000" dirty="0">
                 <a:latin typeface="Arial" charset="0"/>
               </a:rPr>
-              <a:t>print(</a:t>
+              <a:t>print(Prob[Ibest])</a:t>
             </a:r>
             <a:r>
               <a:rPr lang="en-AU" altLang="en-US" sz="2000" dirty="0" err="1">
                 <a:latin typeface="Arial" charset="0"/>
               </a:rPr>
-              <a:t>Probs</a:t>
+              <a:t/>
             </a:r>
             <a:r>
               <a:rPr lang="en-AU" altLang="en-US" sz="2000" dirty="0">
                 <a:latin typeface="Arial" charset="0"/>
               </a:rPr>
-              <a:t>[</a:t>
+              <a:t/>
             </a:r>
             <a:r>
               <a:rPr lang="en-AU" altLang="en-US" sz="2000" dirty="0" err="1">
                 <a:latin typeface="Arial" charset="0"/>
               </a:rPr>
-              <a:t>Ibest</a:t>
+              <a:t/>
             </a:r>
             <a:r>
               <a:rPr lang="en-AU" altLang="en-US" sz="2000" dirty="0">
                 <a:latin typeface="Arial" charset="0"/>
               </a:rPr>
-              <a:t>])</a:t>
+              <a:t/>
             </a:r>
           </a:p>
         </p:txBody>

--- a/Day4_Likelihood_BayesI/FW536_Day4_Morning_maximum likelihod_nosoln_accessible.pptx
+++ b/Day4_Likelihood_BayesI/FW536_Day4_Morning_maximum likelihod_nosoln_accessible.pptx
@@ -30907,6 +30907,10 @@
             <a:pPr algn="ctr" eaLnBrk="1" hangingPunct="1">
               <a:defRPr/>
             </a:pPr>
+            <a:r>
+              <a:rPr lang="en-AU" altLang="en-US"/>
+              <a:t>Data</a:t>
+            </a:r>
           </a:p>
         </p:txBody>
       </p:sp>
@@ -31180,6 +31184,10 @@
             <a:pPr algn="ctr" eaLnBrk="1" hangingPunct="1">
               <a:defRPr/>
             </a:pPr>
+            <a:r>
+              <a:rPr lang="en-AU" altLang="en-US"/>
+              <a:t>Parameter</a:t>
+            </a:r>
           </a:p>
         </p:txBody>
       </p:sp>
@@ -31509,6 +31517,10 @@
             <a:pPr algn="ctr" eaLnBrk="1" hangingPunct="1">
               <a:defRPr/>
             </a:pPr>
+            <a:r>
+              <a:rPr lang="en-AU" altLang="en-US"/>
+              <a:t>Error</a:t>
+            </a:r>
           </a:p>
         </p:txBody>
       </p:sp>
@@ -36901,6 +36913,50 @@
               <a:t>Results:</a:t>
             </a:r>
           </a:p>
+          <a:p>
+            <a:pPr eaLnBrk="1" hangingPunct="1">
+              <a:buFontTx/>
+              <a:buAutoNum type="arabicPeriod"/>
+              <a:defRPr/>
+            </a:pPr>
+            <a:r>
+              <a:rPr lang="en-AU" altLang="en-US" sz="1600" dirty="0"/>
+              <a:t>4.82e-149</a:t>
+            </a:r>
+          </a:p>
+          <a:p>
+            <a:pPr eaLnBrk="1" hangingPunct="1">
+              <a:buFontTx/>
+              <a:buAutoNum type="arabicPeriod"/>
+              <a:defRPr/>
+            </a:pPr>
+            <a:r>
+              <a:rPr lang="en-AU" altLang="en-US" sz="1600" dirty="0"/>
+              <a:t>2.74e-87</a:t>
+            </a:r>
+          </a:p>
+          <a:p>
+            <a:pPr eaLnBrk="1" hangingPunct="1">
+              <a:buFontTx/>
+              <a:buAutoNum type="arabicPeriod"/>
+              <a:defRPr/>
+            </a:pPr>
+            <a:r>
+              <a:rPr lang="en-AU" altLang="en-US" sz="1600" dirty="0"/>
+              <a:t>2.744-80</a:t>
+            </a:r>
+          </a:p>
+          <a:p>
+            <a:pPr eaLnBrk="1" hangingPunct="1">
+              <a:buFontTx/>
+              <a:buAutoNum type="arabicPeriod"/>
+              <a:defRPr/>
+            </a:pPr>
+            <a:r>
+              <a:rPr lang="en-AU" altLang="en-US" sz="1600" dirty="0"/>
+              <a:t>3.64e-82</a:t>
+            </a:r>
+          </a:p>
         </p:txBody>
       </p:sp>
       <p:sp>
@@ -37113,6 +37169,15 @@
               </a:defRPr>
             </a:lvl9pPr>
           </a:lstStyle>
+          <a:p>
+            <a:pPr algn="ctr" eaLnBrk="1" hangingPunct="1">
+              <a:defRPr/>
+            </a:pPr>
+            <a:r>
+              <a:rPr lang="en-AU" altLang="en-US" dirty="0"/>
+              <a:t>Best (so far)</a:t>
+            </a:r>
+          </a:p>
           <a:p>
             <a:pPr algn="ctr" eaLnBrk="1" hangingPunct="1">
               <a:defRPr/>

--- a/Day4_Likelihood_BayesI/FW536_Day4_Morning_maximum likelihod_nosoln_accessible.pptx
+++ b/Day4_Likelihood_BayesI/FW536_Day4_Morning_maximum likelihod_nosoln_accessible.pptx
@@ -18164,7 +18164,7 @@
                   <a:srgbClr val="000000"/>
                 </a:solidFill>
               </a:rPr>
-              <a:t>	longer blow times)?</a:t>
+              <a:t>	higher blow rate)?</a:t>
             </a:r>
           </a:p>
           <a:p>
@@ -18192,7 +18192,7 @@
                   <a:srgbClr val="000000"/>
                 </a:solidFill>
               </a:rPr>
-              <a:t>      length of blow?</a:t>
+              <a:t>      blow rate?</a:t>
             </a:r>
           </a:p>
           <a:p>
